--- a/assemblies-and-events/world-kindness-day/downloads/World_Kindness_Day_Assembly.pptx
+++ b/assemblies-and-events/world-kindness-day/downloads/World_Kindness_Day_Assembly.pptx
@@ -3113,7 +3113,7 @@
             <a:avLst/>
           </a:prstGeom>
           <a:solidFill>
-            <a:srgbClr val="F8F1E2"/>
+            <a:srgbClr val="F3DA8C"/>
           </a:solidFill>
           <a:ln>
             <a:noFill/>
@@ -3199,7 +3199,7 @@
             <a:r>
               <a:rPr sz="4400" b="1" i="0">
                 <a:solidFill>
-                  <a:srgbClr val="8A6420"/>
+                  <a:srgbClr val="3A3320"/>
                 </a:solidFill>
                 <a:latin typeface="Libre Caslon Display"/>
               </a:rPr>
@@ -3223,7 +3223,7 @@
             <a:avLst/>
           </a:prstGeom>
           <a:solidFill>
-            <a:srgbClr val="C59A45"/>
+            <a:srgbClr val="A8770F"/>
           </a:solidFill>
           <a:ln>
             <a:noFill/>
@@ -3327,7 +3327,7 @@
             <a:r>
               <a:rPr sz="1300" b="0" i="0">
                 <a:solidFill>
-                  <a:srgbClr val="8B9179"/>
+                  <a:srgbClr val="5C6552"/>
                 </a:solidFill>
                 <a:latin typeface="Karla"/>
               </a:rPr>
@@ -3393,7 +3393,7 @@
             <a:r>
               <a:rPr sz="850" b="0" i="1">
                 <a:solidFill>
-                  <a:srgbClr val="8B9179"/>
+                  <a:srgbClr val="5C6552"/>
                 </a:solidFill>
                 <a:latin typeface="Karla"/>
               </a:rPr>
@@ -3435,7 +3435,7 @@
             <a:r>
               <a:rPr sz="850" b="0" i="0">
                 <a:solidFill>
-                  <a:srgbClr val="8B9179"/>
+                  <a:srgbClr val="5C6552"/>
                 </a:solidFill>
                 <a:latin typeface="Karla"/>
               </a:rPr>
@@ -3477,7 +3477,7 @@
             <a:avLst/>
           </a:prstGeom>
           <a:solidFill>
-            <a:srgbClr val="8A6420"/>
+            <a:srgbClr val="F3DA8C"/>
           </a:solidFill>
           <a:ln>
             <a:noFill/>
@@ -3539,7 +3539,7 @@
             <a:r>
               <a:rPr sz="2800" b="1" i="0">
                 <a:solidFill>
-                  <a:srgbClr val="FFFDF7"/>
+                  <a:srgbClr val="3A3320"/>
                 </a:solidFill>
                 <a:latin typeface="Libre Caslon Display"/>
               </a:rPr>
@@ -3561,7 +3561,7 @@
             <a:r>
               <a:rPr sz="2800" b="1" i="0">
                 <a:solidFill>
-                  <a:srgbClr val="FFFDF7"/>
+                  <a:srgbClr val="3A3320"/>
                 </a:solidFill>
                 <a:latin typeface="Libre Caslon Display"/>
               </a:rPr>
@@ -3585,7 +3585,7 @@
             <a:avLst/>
           </a:prstGeom>
           <a:solidFill>
-            <a:srgbClr val="EAD8AE"/>
+            <a:srgbClr val="A8770F"/>
           </a:solidFill>
           <a:ln>
             <a:noFill/>
@@ -3647,7 +3647,7 @@
             <a:r>
               <a:rPr sz="1350" b="0" i="0">
                 <a:solidFill>
-                  <a:srgbClr val="EAD8AE"/>
+                  <a:srgbClr val="5C6552"/>
                 </a:solidFill>
                 <a:latin typeface="Karla"/>
               </a:rPr>
@@ -3713,7 +3713,7 @@
             <a:r>
               <a:rPr sz="850" b="0" i="1">
                 <a:solidFill>
-                  <a:srgbClr val="EAD8AE"/>
+                  <a:srgbClr val="5C6552"/>
                 </a:solidFill>
                 <a:latin typeface="Karla"/>
               </a:rPr>
@@ -3755,7 +3755,7 @@
             <a:r>
               <a:rPr sz="850" b="0" i="0">
                 <a:solidFill>
-                  <a:srgbClr val="EAD8AE"/>
+                  <a:srgbClr val="5C6552"/>
                 </a:solidFill>
                 <a:latin typeface="Karla"/>
               </a:rPr>
@@ -3797,7 +3797,7 @@
             <a:avLst/>
           </a:prstGeom>
           <a:solidFill>
-            <a:srgbClr val="F8F1E2"/>
+            <a:srgbClr val="F3DA8C"/>
           </a:solidFill>
           <a:ln>
             <a:noFill/>
@@ -3883,7 +3883,7 @@
             <a:r>
               <a:rPr sz="3200" b="1" i="0">
                 <a:solidFill>
-                  <a:srgbClr val="8A6420"/>
+                  <a:srgbClr val="3A3320"/>
                 </a:solidFill>
                 <a:latin typeface="Libre Caslon Display"/>
               </a:rPr>
@@ -3967,7 +3967,7 @@
             <a:r>
               <a:rPr sz="1200" b="0" i="0">
                 <a:solidFill>
-                  <a:srgbClr val="8B9179"/>
+                  <a:srgbClr val="5C6552"/>
                 </a:solidFill>
                 <a:latin typeface="Karla"/>
               </a:rPr>
@@ -4033,7 +4033,7 @@
             <a:r>
               <a:rPr sz="850" b="0" i="1">
                 <a:solidFill>
-                  <a:srgbClr val="8B9179"/>
+                  <a:srgbClr val="5C6552"/>
                 </a:solidFill>
                 <a:latin typeface="Karla"/>
               </a:rPr>
@@ -4075,7 +4075,7 @@
             <a:r>
               <a:rPr sz="850" b="0" i="0">
                 <a:solidFill>
-                  <a:srgbClr val="8B9179"/>
+                  <a:srgbClr val="5C6552"/>
                 </a:solidFill>
                 <a:latin typeface="Karla"/>
               </a:rPr>
@@ -4117,7 +4117,7 @@
             <a:avLst/>
           </a:prstGeom>
           <a:solidFill>
-            <a:srgbClr val="8A6420"/>
+            <a:srgbClr val="F3DA8C"/>
           </a:solidFill>
           <a:ln>
             <a:noFill/>
@@ -4179,7 +4179,7 @@
             <a:r>
               <a:rPr sz="2800" b="1" i="0">
                 <a:solidFill>
-                  <a:srgbClr val="FFFDF7"/>
+                  <a:srgbClr val="3A3320"/>
                 </a:solidFill>
                 <a:latin typeface="Libre Caslon Display"/>
               </a:rPr>
@@ -4201,7 +4201,7 @@
             <a:r>
               <a:rPr sz="2800" b="1" i="0">
                 <a:solidFill>
-                  <a:srgbClr val="FFFDF7"/>
+                  <a:srgbClr val="3A3320"/>
                 </a:solidFill>
                 <a:latin typeface="Libre Caslon Display"/>
               </a:rPr>
@@ -4225,7 +4225,7 @@
             <a:avLst/>
           </a:prstGeom>
           <a:solidFill>
-            <a:srgbClr val="EAD8AE"/>
+            <a:srgbClr val="A8770F"/>
           </a:solidFill>
           <a:ln>
             <a:noFill/>
@@ -4287,7 +4287,7 @@
             <a:r>
               <a:rPr sz="1350" b="0" i="0">
                 <a:solidFill>
-                  <a:srgbClr val="EAD8AE"/>
+                  <a:srgbClr val="5C6552"/>
                 </a:solidFill>
                 <a:latin typeface="Karla"/>
               </a:rPr>
@@ -4353,7 +4353,7 @@
             <a:r>
               <a:rPr sz="850" b="0" i="1">
                 <a:solidFill>
-                  <a:srgbClr val="EAD8AE"/>
+                  <a:srgbClr val="5C6552"/>
                 </a:solidFill>
                 <a:latin typeface="Karla"/>
               </a:rPr>
@@ -4395,7 +4395,7 @@
             <a:r>
               <a:rPr sz="850" b="0" i="0">
                 <a:solidFill>
-                  <a:srgbClr val="EAD8AE"/>
+                  <a:srgbClr val="5C6552"/>
                 </a:solidFill>
                 <a:latin typeface="Karla"/>
               </a:rPr>
@@ -4499,7 +4499,7 @@
             <a:r>
               <a:rPr sz="1050" b="1" i="0" spc="160">
                 <a:solidFill>
-                  <a:srgbClr val="8A6420"/>
+                  <a:srgbClr val="3A3320"/>
                 </a:solidFill>
                 <a:latin typeface="Karla"/>
               </a:rPr>
@@ -4609,7 +4609,7 @@
             </a:avLst>
           </a:prstGeom>
           <a:solidFill>
-            <a:srgbClr val="F8F1E2"/>
+            <a:srgbClr val="FBF3DD"/>
           </a:solidFill>
           <a:ln>
             <a:noFill/>
@@ -4653,7 +4653,7 @@
             <a:avLst/>
           </a:prstGeom>
           <a:solidFill>
-            <a:srgbClr val="C59A45"/>
+            <a:srgbClr val="DBA62F"/>
           </a:solidFill>
           <a:ln>
             <a:noFill/>
@@ -4741,7 +4741,7 @@
                 </a:solidFill>
                 <a:latin typeface="Karla"/>
               </a:rPr>
-              <a:t>This week: five minutes in form time each day, ending on World Kindness Day.</a:t>
+              <a:t>This week: five minutes of form time a day, ending on Friday.</a:t>
             </a:r>
           </a:p>
         </p:txBody>
@@ -4991,7 +4991,7 @@
             <a:r>
               <a:rPr sz="1050" b="1" i="0" spc="160">
                 <a:solidFill>
-                  <a:srgbClr val="8A6420"/>
+                  <a:srgbClr val="3A3320"/>
                 </a:solidFill>
                 <a:latin typeface="Karla"/>
               </a:rPr>
@@ -5163,7 +5163,7 @@
             <a:r>
               <a:rPr sz="4600" b="1" i="0">
                 <a:solidFill>
-                  <a:srgbClr val="8A6420"/>
+                  <a:srgbClr val="3A3320"/>
                 </a:solidFill>
                 <a:latin typeface="Libre Caslon Display"/>
               </a:rPr>
@@ -5209,7 +5209,7 @@
                 </a:solidFill>
                 <a:latin typeface="Karla"/>
               </a:rPr>
-              <a:t>how big the people giving it thought it was</a:t>
+              <a:t>how big the givers thought it was</a:t>
             </a:r>
           </a:p>
         </p:txBody>
@@ -5231,7 +5231,7 @@
             </a:avLst>
           </a:prstGeom>
           <a:solidFill>
-            <a:srgbClr val="8A6420"/>
+            <a:srgbClr val="DBA62F"/>
           </a:solidFill>
           <a:ln>
             <a:noFill/>
@@ -5293,7 +5293,7 @@
             <a:r>
               <a:rPr sz="4600" b="1" i="0">
                 <a:solidFill>
-                  <a:srgbClr val="FFFDF7"/>
+                  <a:srgbClr val="3A3320"/>
                 </a:solidFill>
                 <a:latin typeface="Libre Caslon Display"/>
               </a:rPr>
@@ -5335,7 +5335,7 @@
             <a:r>
               <a:rPr sz="1300" b="0" i="0">
                 <a:solidFill>
-                  <a:srgbClr val="EAD8AE"/>
+                  <a:srgbClr val="3A3320"/>
                 </a:solidFill>
                 <a:latin typeface="Karla"/>
               </a:rPr>
@@ -5377,7 +5377,7 @@
             <a:r>
               <a:rPr sz="1200" b="0" i="1">
                 <a:solidFill>
-                  <a:srgbClr val="8A6420"/>
+                  <a:srgbClr val="3A3320"/>
                 </a:solidFill>
                 <a:latin typeface="Karla"/>
               </a:rPr>
@@ -5631,7 +5631,7 @@
             <a:r>
               <a:rPr sz="1050" b="1" i="0" spc="160">
                 <a:solidFill>
-                  <a:srgbClr val="8A6420"/>
+                  <a:srgbClr val="3A3320"/>
                 </a:solidFill>
                 <a:latin typeface="Karla"/>
               </a:rPr>
@@ -5741,7 +5741,7 @@
             <a:avLst/>
           </a:prstGeom>
           <a:solidFill>
-            <a:srgbClr val="8A6420"/>
+            <a:srgbClr val="DBA62F"/>
           </a:solidFill>
           <a:ln>
             <a:noFill/>
@@ -5803,7 +5803,7 @@
             <a:r>
               <a:rPr sz="1150" b="1" i="0">
                 <a:solidFill>
-                  <a:srgbClr val="FFFDF7"/>
+                  <a:srgbClr val="3A3320"/>
                 </a:solidFill>
                 <a:latin typeface="Karla"/>
               </a:rPr>
@@ -5845,7 +5845,7 @@
             <a:r>
               <a:rPr sz="1300" b="1" i="0">
                 <a:solidFill>
-                  <a:srgbClr val="8A6420"/>
+                  <a:srgbClr val="3A3320"/>
                 </a:solidFill>
                 <a:latin typeface="Libre Caslon Display"/>
               </a:rPr>
@@ -5955,7 +5955,7 @@
             <a:avLst/>
           </a:prstGeom>
           <a:solidFill>
-            <a:srgbClr val="8A6420"/>
+            <a:srgbClr val="DBA62F"/>
           </a:solidFill>
           <a:ln>
             <a:noFill/>
@@ -6017,7 +6017,7 @@
             <a:r>
               <a:rPr sz="1150" b="1" i="0">
                 <a:solidFill>
-                  <a:srgbClr val="FFFDF7"/>
+                  <a:srgbClr val="3A3320"/>
                 </a:solidFill>
                 <a:latin typeface="Karla"/>
               </a:rPr>
@@ -6059,7 +6059,7 @@
             <a:r>
               <a:rPr sz="1300" b="1" i="0">
                 <a:solidFill>
-                  <a:srgbClr val="8A6420"/>
+                  <a:srgbClr val="3A3320"/>
                 </a:solidFill>
                 <a:latin typeface="Libre Caslon Display"/>
               </a:rPr>
@@ -6169,7 +6169,7 @@
             <a:avLst/>
           </a:prstGeom>
           <a:solidFill>
-            <a:srgbClr val="8A6420"/>
+            <a:srgbClr val="DBA62F"/>
           </a:solidFill>
           <a:ln>
             <a:noFill/>
@@ -6231,7 +6231,7 @@
             <a:r>
               <a:rPr sz="1150" b="1" i="0">
                 <a:solidFill>
-                  <a:srgbClr val="FFFDF7"/>
+                  <a:srgbClr val="3A3320"/>
                 </a:solidFill>
                 <a:latin typeface="Karla"/>
               </a:rPr>
@@ -6273,7 +6273,7 @@
             <a:r>
               <a:rPr sz="1300" b="1" i="0">
                 <a:solidFill>
-                  <a:srgbClr val="8A6420"/>
+                  <a:srgbClr val="3A3320"/>
                 </a:solidFill>
                 <a:latin typeface="Libre Caslon Display"/>
               </a:rPr>
@@ -6357,7 +6357,7 @@
             <a:r>
               <a:rPr sz="1200" b="0" i="1">
                 <a:solidFill>
-                  <a:srgbClr val="8A6420"/>
+                  <a:srgbClr val="3A3320"/>
                 </a:solidFill>
                 <a:latin typeface="Karla"/>
               </a:rPr>
@@ -6611,7 +6611,7 @@
             <a:r>
               <a:rPr sz="1050" b="1" i="0" spc="160">
                 <a:solidFill>
-                  <a:srgbClr val="8A6420"/>
+                  <a:srgbClr val="3A3320"/>
                 </a:solidFill>
                 <a:latin typeface="Karla"/>
               </a:rPr>
@@ -6721,7 +6721,7 @@
             <a:avLst/>
           </a:prstGeom>
           <a:solidFill>
-            <a:srgbClr val="8A6420"/>
+            <a:srgbClr val="DBA62F"/>
           </a:solidFill>
           <a:ln>
             <a:noFill/>
@@ -6783,7 +6783,7 @@
             <a:r>
               <a:rPr sz="1150" b="1" i="0">
                 <a:solidFill>
-                  <a:srgbClr val="FFFDF7"/>
+                  <a:srgbClr val="3A3320"/>
                 </a:solidFill>
                 <a:latin typeface="Karla"/>
               </a:rPr>
@@ -6825,7 +6825,7 @@
             <a:r>
               <a:rPr sz="1300" b="1" i="0">
                 <a:solidFill>
-                  <a:srgbClr val="8A6420"/>
+                  <a:srgbClr val="3A3320"/>
                 </a:solidFill>
                 <a:latin typeface="Libre Caslon Display"/>
               </a:rPr>
@@ -6935,7 +6935,7 @@
             <a:avLst/>
           </a:prstGeom>
           <a:solidFill>
-            <a:srgbClr val="8A6420"/>
+            <a:srgbClr val="DBA62F"/>
           </a:solidFill>
           <a:ln>
             <a:noFill/>
@@ -6997,7 +6997,7 @@
             <a:r>
               <a:rPr sz="1150" b="1" i="0">
                 <a:solidFill>
-                  <a:srgbClr val="FFFDF7"/>
+                  <a:srgbClr val="3A3320"/>
                 </a:solidFill>
                 <a:latin typeface="Karla"/>
               </a:rPr>
@@ -7039,7 +7039,7 @@
             <a:r>
               <a:rPr sz="1300" b="1" i="0">
                 <a:solidFill>
-                  <a:srgbClr val="8A6420"/>
+                  <a:srgbClr val="3A3320"/>
                 </a:solidFill>
                 <a:latin typeface="Libre Caslon Display"/>
               </a:rPr>
@@ -7149,7 +7149,7 @@
             <a:avLst/>
           </a:prstGeom>
           <a:solidFill>
-            <a:srgbClr val="8A6420"/>
+            <a:srgbClr val="DBA62F"/>
           </a:solidFill>
           <a:ln>
             <a:noFill/>
@@ -7211,7 +7211,7 @@
             <a:r>
               <a:rPr sz="1150" b="1" i="0">
                 <a:solidFill>
-                  <a:srgbClr val="FFFDF7"/>
+                  <a:srgbClr val="3A3320"/>
                 </a:solidFill>
                 <a:latin typeface="Karla"/>
               </a:rPr>
@@ -7253,7 +7253,7 @@
             <a:r>
               <a:rPr sz="1300" b="1" i="0">
                 <a:solidFill>
-                  <a:srgbClr val="8A6420"/>
+                  <a:srgbClr val="3A3320"/>
                 </a:solidFill>
                 <a:latin typeface="Libre Caslon Display"/>
               </a:rPr>
@@ -7337,7 +7337,7 @@
             <a:r>
               <a:rPr sz="1200" b="0" i="1">
                 <a:solidFill>
-                  <a:srgbClr val="8A6420"/>
+                  <a:srgbClr val="3A3320"/>
                 </a:solidFill>
                 <a:latin typeface="Karla"/>
               </a:rPr>
@@ -7591,7 +7591,7 @@
             <a:r>
               <a:rPr sz="1050" b="1" i="0" spc="160">
                 <a:solidFill>
-                  <a:srgbClr val="8A6420"/>
+                  <a:srgbClr val="3A3320"/>
                 </a:solidFill>
                 <a:latin typeface="Karla"/>
               </a:rPr>
@@ -7701,7 +7701,7 @@
             <a:avLst/>
           </a:prstGeom>
           <a:solidFill>
-            <a:srgbClr val="8A6420"/>
+            <a:srgbClr val="DBA62F"/>
           </a:solidFill>
           <a:ln>
             <a:noFill/>
@@ -7763,7 +7763,7 @@
             <a:r>
               <a:rPr sz="1150" b="1" i="0">
                 <a:solidFill>
-                  <a:srgbClr val="FFFDF7"/>
+                  <a:srgbClr val="3A3320"/>
                 </a:solidFill>
                 <a:latin typeface="Karla"/>
               </a:rPr>
@@ -7805,7 +7805,7 @@
             <a:r>
               <a:rPr sz="1300" b="1" i="0">
                 <a:solidFill>
-                  <a:srgbClr val="8A6420"/>
+                  <a:srgbClr val="3A3320"/>
                 </a:solidFill>
                 <a:latin typeface="Libre Caslon Display"/>
               </a:rPr>
@@ -7915,7 +7915,7 @@
             <a:avLst/>
           </a:prstGeom>
           <a:solidFill>
-            <a:srgbClr val="8A6420"/>
+            <a:srgbClr val="DBA62F"/>
           </a:solidFill>
           <a:ln>
             <a:noFill/>
@@ -7977,7 +7977,7 @@
             <a:r>
               <a:rPr sz="1150" b="1" i="0">
                 <a:solidFill>
-                  <a:srgbClr val="FFFDF7"/>
+                  <a:srgbClr val="3A3320"/>
                 </a:solidFill>
                 <a:latin typeface="Karla"/>
               </a:rPr>
@@ -8019,7 +8019,7 @@
             <a:r>
               <a:rPr sz="1300" b="1" i="0">
                 <a:solidFill>
-                  <a:srgbClr val="8A6420"/>
+                  <a:srgbClr val="3A3320"/>
                 </a:solidFill>
                 <a:latin typeface="Libre Caslon Display"/>
               </a:rPr>
@@ -8129,7 +8129,7 @@
             <a:avLst/>
           </a:prstGeom>
           <a:solidFill>
-            <a:srgbClr val="8A6420"/>
+            <a:srgbClr val="DBA62F"/>
           </a:solidFill>
           <a:ln>
             <a:noFill/>
@@ -8191,7 +8191,7 @@
             <a:r>
               <a:rPr sz="1150" b="1" i="0">
                 <a:solidFill>
-                  <a:srgbClr val="FFFDF7"/>
+                  <a:srgbClr val="3A3320"/>
                 </a:solidFill>
                 <a:latin typeface="Karla"/>
               </a:rPr>
@@ -8233,7 +8233,7 @@
             <a:r>
               <a:rPr sz="1300" b="1" i="0">
                 <a:solidFill>
-                  <a:srgbClr val="8A6420"/>
+                  <a:srgbClr val="3A3320"/>
                 </a:solidFill>
                 <a:latin typeface="Libre Caslon Display"/>
               </a:rPr>
@@ -8317,7 +8317,7 @@
             <a:r>
               <a:rPr sz="1200" b="0" i="1">
                 <a:solidFill>
-                  <a:srgbClr val="8A6420"/>
+                  <a:srgbClr val="3A3320"/>
                 </a:solidFill>
                 <a:latin typeface="Karla"/>
               </a:rPr>
@@ -8571,7 +8571,7 @@
             <a:r>
               <a:rPr sz="1050" b="1" i="0" spc="160">
                 <a:solidFill>
-                  <a:srgbClr val="8A6420"/>
+                  <a:srgbClr val="3A3320"/>
                 </a:solidFill>
                 <a:latin typeface="Karla"/>
               </a:rPr>
@@ -8681,7 +8681,7 @@
             <a:avLst/>
           </a:prstGeom>
           <a:solidFill>
-            <a:srgbClr val="8A6420"/>
+            <a:srgbClr val="DBA62F"/>
           </a:solidFill>
           <a:ln>
             <a:noFill/>
@@ -8767,7 +8767,7 @@
             <a:r>
               <a:rPr sz="1350" b="1" i="0">
                 <a:solidFill>
-                  <a:srgbClr val="8A6420"/>
+                  <a:srgbClr val="3A3320"/>
                 </a:solidFill>
                 <a:latin typeface="Libre Caslon Display"/>
               </a:rPr>
@@ -8877,7 +8877,7 @@
             <a:avLst/>
           </a:prstGeom>
           <a:solidFill>
-            <a:srgbClr val="8A6420"/>
+            <a:srgbClr val="DBA62F"/>
           </a:solidFill>
           <a:ln>
             <a:noFill/>
@@ -8963,7 +8963,7 @@
             <a:r>
               <a:rPr sz="1350" b="1" i="0">
                 <a:solidFill>
-                  <a:srgbClr val="8A6420"/>
+                  <a:srgbClr val="3A3320"/>
                 </a:solidFill>
                 <a:latin typeface="Libre Caslon Display"/>
               </a:rPr>
@@ -9073,7 +9073,7 @@
             <a:avLst/>
           </a:prstGeom>
           <a:solidFill>
-            <a:srgbClr val="8A6420"/>
+            <a:srgbClr val="DBA62F"/>
           </a:solidFill>
           <a:ln>
             <a:noFill/>
@@ -9159,7 +9159,7 @@
             <a:r>
               <a:rPr sz="1350" b="1" i="0">
                 <a:solidFill>
-                  <a:srgbClr val="8A6420"/>
+                  <a:srgbClr val="3A3320"/>
                 </a:solidFill>
                 <a:latin typeface="Libre Caslon Display"/>
               </a:rPr>
@@ -9243,7 +9243,7 @@
             <a:r>
               <a:rPr sz="1200" b="0" i="1">
                 <a:solidFill>
-                  <a:srgbClr val="8A6420"/>
+                  <a:srgbClr val="3A3320"/>
                 </a:solidFill>
                 <a:latin typeface="Karla"/>
               </a:rPr>
@@ -9497,7 +9497,7 @@
             <a:r>
               <a:rPr sz="1050" b="1" i="0" spc="160">
                 <a:solidFill>
-                  <a:srgbClr val="8A6420"/>
+                  <a:srgbClr val="3A3320"/>
                 </a:solidFill>
                 <a:latin typeface="Karla"/>
               </a:rPr>
@@ -9625,7 +9625,7 @@
             <a:r>
               <a:rPr sz="1150" b="1" i="0" spc="140">
                 <a:solidFill>
-                  <a:srgbClr val="8A6420"/>
+                  <a:srgbClr val="3A3320"/>
                 </a:solidFill>
                 <a:latin typeface="Karla"/>
               </a:rPr>
@@ -9649,7 +9649,7 @@
             <a:avLst/>
           </a:prstGeom>
           <a:solidFill>
-            <a:srgbClr val="8A6420"/>
+            <a:srgbClr val="DBA62F"/>
           </a:solidFill>
           <a:ln>
             <a:noFill/>
@@ -9735,7 +9735,7 @@
             <a:r>
               <a:rPr sz="1350" b="1" i="0">
                 <a:solidFill>
-                  <a:srgbClr val="8A6420"/>
+                  <a:srgbClr val="3A3320"/>
                 </a:solidFill>
                 <a:latin typeface="Libre Caslon Display"/>
               </a:rPr>
@@ -9821,7 +9821,7 @@
             <a:r>
               <a:rPr sz="1150" b="1" i="0" spc="140">
                 <a:solidFill>
-                  <a:srgbClr val="8A6420"/>
+                  <a:srgbClr val="3A3320"/>
                 </a:solidFill>
                 <a:latin typeface="Karla"/>
               </a:rPr>
@@ -9845,7 +9845,7 @@
             <a:avLst/>
           </a:prstGeom>
           <a:solidFill>
-            <a:srgbClr val="8A6420"/>
+            <a:srgbClr val="DBA62F"/>
           </a:solidFill>
           <a:ln>
             <a:noFill/>
@@ -9931,7 +9931,7 @@
             <a:r>
               <a:rPr sz="1350" b="1" i="0">
                 <a:solidFill>
-                  <a:srgbClr val="8A6420"/>
+                  <a:srgbClr val="3A3320"/>
                 </a:solidFill>
                 <a:latin typeface="Libre Caslon Display"/>
               </a:rPr>
@@ -10017,7 +10017,7 @@
             <a:r>
               <a:rPr sz="1150" b="1" i="0" spc="140">
                 <a:solidFill>
-                  <a:srgbClr val="8A6420"/>
+                  <a:srgbClr val="3A3320"/>
                 </a:solidFill>
                 <a:latin typeface="Karla"/>
               </a:rPr>
@@ -10041,7 +10041,7 @@
             <a:avLst/>
           </a:prstGeom>
           <a:solidFill>
-            <a:srgbClr val="8A6420"/>
+            <a:srgbClr val="DBA62F"/>
           </a:solidFill>
           <a:ln>
             <a:noFill/>
@@ -10127,7 +10127,7 @@
             <a:r>
               <a:rPr sz="1350" b="1" i="0">
                 <a:solidFill>
-                  <a:srgbClr val="8A6420"/>
+                  <a:srgbClr val="3A3320"/>
                 </a:solidFill>
                 <a:latin typeface="Libre Caslon Display"/>
               </a:rPr>
@@ -10213,7 +10213,7 @@
             <a:r>
               <a:rPr sz="1150" b="1" i="0" spc="140">
                 <a:solidFill>
-                  <a:srgbClr val="8A6420"/>
+                  <a:srgbClr val="3A3320"/>
                 </a:solidFill>
                 <a:latin typeface="Karla"/>
               </a:rPr>
@@ -10237,7 +10237,7 @@
             <a:avLst/>
           </a:prstGeom>
           <a:solidFill>
-            <a:srgbClr val="8A6420"/>
+            <a:srgbClr val="DBA62F"/>
           </a:solidFill>
           <a:ln>
             <a:noFill/>
@@ -10323,7 +10323,7 @@
             <a:r>
               <a:rPr sz="1350" b="1" i="0">
                 <a:solidFill>
-                  <a:srgbClr val="8A6420"/>
+                  <a:srgbClr val="3A3320"/>
                 </a:solidFill>
                 <a:latin typeface="Libre Caslon Display"/>
               </a:rPr>
@@ -10409,7 +10409,7 @@
             <a:r>
               <a:rPr sz="1150" b="1" i="0" spc="140">
                 <a:solidFill>
-                  <a:srgbClr val="8A6420"/>
+                  <a:srgbClr val="3A3320"/>
                 </a:solidFill>
                 <a:latin typeface="Karla"/>
               </a:rPr>
@@ -10433,7 +10433,7 @@
             <a:avLst/>
           </a:prstGeom>
           <a:solidFill>
-            <a:srgbClr val="8A6420"/>
+            <a:srgbClr val="DBA62F"/>
           </a:solidFill>
           <a:ln>
             <a:noFill/>
@@ -10519,7 +10519,7 @@
             <a:r>
               <a:rPr sz="1350" b="1" i="0">
                 <a:solidFill>
-                  <a:srgbClr val="8A6420"/>
+                  <a:srgbClr val="3A3320"/>
                 </a:solidFill>
                 <a:latin typeface="Libre Caslon Display"/>
               </a:rPr>
@@ -10561,7 +10561,7 @@
             <a:r>
               <a:rPr sz="1200" b="0" i="1">
                 <a:solidFill>
-                  <a:srgbClr val="8A6420"/>
+                  <a:srgbClr val="3A3320"/>
                 </a:solidFill>
                 <a:latin typeface="Karla"/>
               </a:rPr>

--- a/assemblies-and-events/world-kindness-day/downloads/World_Kindness_Day_Assembly.pptx
+++ b/assemblies-and-events/world-kindness-day/downloads/World_Kindness_Day_Assembly.pptx
@@ -3197,11 +3197,11 @@
               </a:spcAft>
             </a:pPr>
             <a:r>
-              <a:rPr sz="4400" b="1" i="0">
+              <a:rPr sz="4400" b="0" i="0">
                 <a:solidFill>
                   <a:srgbClr val="3A3320"/>
                 </a:solidFill>
-                <a:latin typeface="Libre Caslon Display"/>
+                <a:latin typeface="Georgia"/>
               </a:rPr>
               <a:t>World Kindness Day</a:t>
             </a:r>
@@ -3287,7 +3287,7 @@
                 <a:solidFill>
                   <a:srgbClr val="5C6552"/>
                 </a:solidFill>
-                <a:latin typeface="Karla"/>
+                <a:latin typeface="Calibri"/>
               </a:rPr>
               <a:t>An Assembly and a Week of Form Time</a:t>
             </a:r>
@@ -3329,7 +3329,7 @@
                 <a:solidFill>
                   <a:srgbClr val="5C6552"/>
                 </a:solidFill>
-                <a:latin typeface="Karla"/>
+                <a:latin typeface="Calibri"/>
               </a:rPr>
               <a:t>13 November, every year</a:t>
             </a:r>
@@ -3395,7 +3395,7 @@
                 <a:solidFill>
                   <a:srgbClr val="5C6552"/>
                 </a:solidFill>
-                <a:latin typeface="Karla"/>
+                <a:latin typeface="Calibri"/>
               </a:rPr>
               <a:t>The Pastoral Guide</a:t>
             </a:r>
@@ -3437,7 +3437,7 @@
                 <a:solidFill>
                   <a:srgbClr val="5C6552"/>
                 </a:solidFill>
-                <a:latin typeface="Karla"/>
+                <a:latin typeface="Calibri"/>
               </a:rPr>
               <a:t>1 / 11</a:t>
             </a:r>
@@ -3537,11 +3537,11 @@
               </a:spcAft>
             </a:pPr>
             <a:r>
-              <a:rPr sz="2800" b="1" i="0">
+              <a:rPr sz="2800" b="0" i="0">
                 <a:solidFill>
                   <a:srgbClr val="3A3320"/>
                 </a:solidFill>
-                <a:latin typeface="Libre Caslon Display"/>
+                <a:latin typeface="Georgia"/>
               </a:rPr>
               <a:t>What number did you pick</a:t>
             </a:r>
@@ -3559,11 +3559,11 @@
               </a:spcAft>
             </a:pPr>
             <a:r>
-              <a:rPr sz="2800" b="1" i="0">
+              <a:rPr sz="2800" b="0" i="0">
                 <a:solidFill>
                   <a:srgbClr val="3A3320"/>
                 </a:solidFill>
-                <a:latin typeface="Libre Caslon Display"/>
+                <a:latin typeface="Georgia"/>
               </a:rPr>
               <a:t>for the hot chocolate?</a:t>
             </a:r>
@@ -3649,7 +3649,7 @@
                 <a:solidFill>
                   <a:srgbClr val="5C6552"/>
                 </a:solidFill>
-                <a:latin typeface="Karla"/>
+                <a:latin typeface="Calibri"/>
               </a:rPr>
               <a:t>The people who got one said 7 out of 10. Most of us guess too low, so this week, test it for yourself.</a:t>
             </a:r>
@@ -3715,7 +3715,7 @@
                 <a:solidFill>
                   <a:srgbClr val="5C6552"/>
                 </a:solidFill>
-                <a:latin typeface="Karla"/>
+                <a:latin typeface="Calibri"/>
               </a:rPr>
               <a:t>The Pastoral Guide</a:t>
             </a:r>
@@ -3757,7 +3757,7 @@
                 <a:solidFill>
                   <a:srgbClr val="5C6552"/>
                 </a:solidFill>
-                <a:latin typeface="Karla"/>
+                <a:latin typeface="Calibri"/>
               </a:rPr>
               <a:t>10 / 11</a:t>
             </a:r>
@@ -3881,11 +3881,11 @@
               </a:spcAft>
             </a:pPr>
             <a:r>
-              <a:rPr sz="3200" b="1" i="0">
+              <a:rPr sz="3200" b="0" i="0">
                 <a:solidFill>
                   <a:srgbClr val="3A3320"/>
                 </a:solidFill>
-                <a:latin typeface="Libre Caslon Display"/>
+                <a:latin typeface="Georgia"/>
               </a:rPr>
               <a:t>Say the kind thing out loud.</a:t>
             </a:r>
@@ -3927,7 +3927,7 @@
                 <a:solidFill>
                   <a:srgbClr val="5C6552"/>
                 </a:solidFill>
-                <a:latin typeface="Karla"/>
+                <a:latin typeface="Calibri"/>
               </a:rPr>
               <a:t>Anti-Bullying Week starts the Monday after World Kindness Day. If something is wrong, tell someone you trust.</a:t>
             </a:r>
@@ -3969,7 +3969,7 @@
                 <a:solidFill>
                   <a:srgbClr val="5C6552"/>
                 </a:solidFill>
-                <a:latin typeface="Karla"/>
+                <a:latin typeface="Calibri"/>
               </a:rPr>
               <a:t>World Kindness Day  ·  An Assembly and a Week of Form Time</a:t>
             </a:r>
@@ -4035,7 +4035,7 @@
                 <a:solidFill>
                   <a:srgbClr val="5C6552"/>
                 </a:solidFill>
-                <a:latin typeface="Karla"/>
+                <a:latin typeface="Calibri"/>
               </a:rPr>
               <a:t>The Pastoral Guide</a:t>
             </a:r>
@@ -4077,7 +4077,7 @@
                 <a:solidFill>
                   <a:srgbClr val="5C6552"/>
                 </a:solidFill>
-                <a:latin typeface="Karla"/>
+                <a:latin typeface="Calibri"/>
               </a:rPr>
               <a:t>11 / 11</a:t>
             </a:r>
@@ -4177,11 +4177,11 @@
               </a:spcAft>
             </a:pPr>
             <a:r>
-              <a:rPr sz="2800" b="1" i="0">
+              <a:rPr sz="2800" b="0" i="0">
                 <a:solidFill>
                   <a:srgbClr val="3A3320"/>
                 </a:solidFill>
-                <a:latin typeface="Libre Caslon Display"/>
+                <a:latin typeface="Georgia"/>
               </a:rPr>
               <a:t>Imagine you buy a stranger</a:t>
             </a:r>
@@ -4199,11 +4199,11 @@
               </a:spcAft>
             </a:pPr>
             <a:r>
-              <a:rPr sz="2800" b="1" i="0">
+              <a:rPr sz="2800" b="0" i="0">
                 <a:solidFill>
                   <a:srgbClr val="3A3320"/>
                 </a:solidFill>
-                <a:latin typeface="Libre Caslon Display"/>
+                <a:latin typeface="Georgia"/>
               </a:rPr>
               <a:t>a hot chocolate.</a:t>
             </a:r>
@@ -4289,7 +4289,7 @@
                 <a:solidFill>
                   <a:srgbClr val="5C6552"/>
                 </a:solidFill>
-                <a:latin typeface="Karla"/>
+                <a:latin typeface="Calibri"/>
               </a:rPr>
               <a:t>On a scale of 0 to 10, how big a deal is it to them? Hold your number in your head. We will come back to it.</a:t>
             </a:r>
@@ -4355,7 +4355,7 @@
                 <a:solidFill>
                   <a:srgbClr val="5C6552"/>
                 </a:solidFill>
-                <a:latin typeface="Karla"/>
+                <a:latin typeface="Calibri"/>
               </a:rPr>
               <a:t>The Pastoral Guide</a:t>
             </a:r>
@@ -4397,7 +4397,7 @@
                 <a:solidFill>
                   <a:srgbClr val="5C6552"/>
                 </a:solidFill>
-                <a:latin typeface="Karla"/>
+                <a:latin typeface="Calibri"/>
               </a:rPr>
               <a:t>2 / 11</a:t>
             </a:r>
@@ -4501,7 +4501,7 @@
                 <a:solidFill>
                   <a:srgbClr val="3A3320"/>
                 </a:solidFill>
-                <a:latin typeface="Karla"/>
+                <a:latin typeface="Calibri"/>
               </a:rPr>
               <a:t>WHAT THE DAY IS</a:t>
             </a:r>
@@ -4539,11 +4539,11 @@
               </a:spcAft>
             </a:pPr>
             <a:r>
-              <a:rPr sz="3200" b="1" i="0">
+              <a:rPr sz="3200" b="0" i="0">
                 <a:solidFill>
                   <a:srgbClr val="2E3436"/>
                 </a:solidFill>
-                <a:latin typeface="Libre Caslon Display"/>
+                <a:latin typeface="Georgia"/>
               </a:rPr>
               <a:t>World Kindness Day</a:t>
             </a:r>
@@ -4585,7 +4585,7 @@
                 <a:solidFill>
                   <a:srgbClr val="5C6552"/>
                 </a:solidFill>
-                <a:latin typeface="Karla"/>
+                <a:latin typeface="Calibri"/>
               </a:rPr>
               <a:t>It has been held on 13 November every year since 1998, when the World Kindness Movement started it.</a:t>
             </a:r>
@@ -4717,7 +4717,7 @@
                 <a:solidFill>
                   <a:srgbClr val="2E3436"/>
                 </a:solidFill>
-                <a:latin typeface="Karla"/>
+                <a:latin typeface="Calibri"/>
               </a:rPr>
               <a:t>This morning: what researchers found when they tested small kind acts.</a:t>
             </a:r>
@@ -4739,7 +4739,7 @@
                 <a:solidFill>
                   <a:srgbClr val="2E3436"/>
                 </a:solidFill>
-                <a:latin typeface="Karla"/>
+                <a:latin typeface="Calibri"/>
               </a:rPr>
               <a:t>This week: five minutes of form time a day, ending on Friday.</a:t>
             </a:r>
@@ -4781,7 +4781,7 @@
                 <a:solidFill>
                   <a:srgbClr val="8B9179"/>
                 </a:solidFill>
-                <a:latin typeface="Karla"/>
+                <a:latin typeface="Calibri"/>
               </a:rPr>
               <a:t>Source: World Kindness Movement</a:t>
             </a:r>
@@ -4847,7 +4847,7 @@
                 <a:solidFill>
                   <a:srgbClr val="8B9179"/>
                 </a:solidFill>
-                <a:latin typeface="Karla"/>
+                <a:latin typeface="Calibri"/>
               </a:rPr>
               <a:t>The Pastoral Guide</a:t>
             </a:r>
@@ -4889,7 +4889,7 @@
                 <a:solidFill>
                   <a:srgbClr val="8B9179"/>
                 </a:solidFill>
-                <a:latin typeface="Karla"/>
+                <a:latin typeface="Calibri"/>
               </a:rPr>
               <a:t>3 / 11</a:t>
             </a:r>
@@ -4993,7 +4993,7 @@
                 <a:solidFill>
                   <a:srgbClr val="3A3320"/>
                 </a:solidFill>
-                <a:latin typeface="Karla"/>
+                <a:latin typeface="Calibri"/>
               </a:rPr>
               <a:t>WHAT THE RESEARCH FOUND</a:t>
             </a:r>
@@ -5031,11 +5031,11 @@
               </a:spcAft>
             </a:pPr>
             <a:r>
-              <a:rPr sz="2600" b="1" i="0">
+              <a:rPr sz="2600" b="0" i="0">
                 <a:solidFill>
                   <a:srgbClr val="2E3436"/>
                 </a:solidFill>
-                <a:latin typeface="Libre Caslon Display"/>
+                <a:latin typeface="Georgia"/>
               </a:rPr>
               <a:t>Small kind acts feel bigger than we think</a:t>
             </a:r>
@@ -5077,7 +5077,7 @@
                 <a:solidFill>
                   <a:srgbClr val="5C6552"/>
                 </a:solidFill>
-                <a:latin typeface="Karla"/>
+                <a:latin typeface="Calibri"/>
               </a:rPr>
               <a:t>At an ice rink in Chicago, people gave a stranger a hot chocolate. Both were asked how big a deal it was, out of 10.</a:t>
             </a:r>
@@ -5161,11 +5161,11 @@
               </a:spcAft>
             </a:pPr>
             <a:r>
-              <a:rPr sz="4600" b="1" i="0">
+              <a:rPr sz="4600" b="0" i="0">
                 <a:solidFill>
                   <a:srgbClr val="3A3320"/>
                 </a:solidFill>
-                <a:latin typeface="Libre Caslon Display"/>
+                <a:latin typeface="Georgia"/>
               </a:rPr>
               <a:t>3.8</a:t>
             </a:r>
@@ -5207,7 +5207,7 @@
                 <a:solidFill>
                   <a:srgbClr val="5C6552"/>
                 </a:solidFill>
-                <a:latin typeface="Karla"/>
+                <a:latin typeface="Calibri"/>
               </a:rPr>
               <a:t>how big the givers thought it was</a:t>
             </a:r>
@@ -5291,11 +5291,11 @@
               </a:spcAft>
             </a:pPr>
             <a:r>
-              <a:rPr sz="4600" b="1" i="0">
+              <a:rPr sz="4600" b="0" i="0">
                 <a:solidFill>
                   <a:srgbClr val="3A3320"/>
                 </a:solidFill>
-                <a:latin typeface="Libre Caslon Display"/>
+                <a:latin typeface="Georgia"/>
               </a:rPr>
               <a:t>7.0</a:t>
             </a:r>
@@ -5337,7 +5337,7 @@
                 <a:solidFill>
                   <a:srgbClr val="3A3320"/>
                 </a:solidFill>
-                <a:latin typeface="Karla"/>
+                <a:latin typeface="Calibri"/>
               </a:rPr>
               <a:t>how big the people getting it said it was</a:t>
             </a:r>
@@ -5379,7 +5379,7 @@
                 <a:solidFill>
                   <a:srgbClr val="3A3320"/>
                 </a:solidFill>
-                <a:latin typeface="Karla"/>
+                <a:latin typeface="Calibri"/>
               </a:rPr>
               <a:t>Think about it: when did something small that someone did for you feel big?</a:t>
             </a:r>
@@ -5421,7 +5421,7 @@
                 <a:solidFill>
                   <a:srgbClr val="8B9179"/>
                 </a:solidFill>
-                <a:latin typeface="Karla"/>
+                <a:latin typeface="Calibri"/>
               </a:rPr>
               <a:t>Source: Kumar and Epley, 2023</a:t>
             </a:r>
@@ -5487,7 +5487,7 @@
                 <a:solidFill>
                   <a:srgbClr val="8B9179"/>
                 </a:solidFill>
-                <a:latin typeface="Karla"/>
+                <a:latin typeface="Calibri"/>
               </a:rPr>
               <a:t>The Pastoral Guide</a:t>
             </a:r>
@@ -5529,7 +5529,7 @@
                 <a:solidFill>
                   <a:srgbClr val="8B9179"/>
                 </a:solidFill>
-                <a:latin typeface="Karla"/>
+                <a:latin typeface="Calibri"/>
               </a:rPr>
               <a:t>4 / 11</a:t>
             </a:r>
@@ -5633,7 +5633,7 @@
                 <a:solidFill>
                   <a:srgbClr val="3A3320"/>
                 </a:solidFill>
-                <a:latin typeface="Karla"/>
+                <a:latin typeface="Calibri"/>
               </a:rPr>
               <a:t>WHAT THE RESEARCH FOUND</a:t>
             </a:r>
@@ -5671,11 +5671,11 @@
               </a:spcAft>
             </a:pPr>
             <a:r>
-              <a:rPr sz="2600" b="1" i="0">
+              <a:rPr sz="2600" b="0" i="0">
                 <a:solidFill>
                   <a:srgbClr val="2E3436"/>
                 </a:solidFill>
-                <a:latin typeface="Libre Caslon Display"/>
+                <a:latin typeface="Georgia"/>
               </a:rPr>
               <a:t>Compliments feel better than we expect</a:t>
             </a:r>
@@ -5805,7 +5805,7 @@
                 <a:solidFill>
                   <a:srgbClr val="3A3320"/>
                 </a:solidFill>
-                <a:latin typeface="Karla"/>
+                <a:latin typeface="Calibri"/>
               </a:rPr>
               <a:t>1</a:t>
             </a:r>
@@ -5843,11 +5843,11 @@
               </a:spcAft>
             </a:pPr>
             <a:r>
-              <a:rPr sz="1300" b="1" i="0">
+              <a:rPr sz="1300" b="0" i="0">
                 <a:solidFill>
                   <a:srgbClr val="3A3320"/>
                 </a:solidFill>
-                <a:latin typeface="Libre Caslon Display"/>
+                <a:latin typeface="Georgia"/>
               </a:rPr>
               <a:t>Students paid compliments to people they did not know.</a:t>
             </a:r>
@@ -5889,7 +5889,7 @@
                 <a:solidFill>
                   <a:srgbClr val="5C6552"/>
                 </a:solidFill>
-                <a:latin typeface="Karla"/>
+                <a:latin typeface="Calibri"/>
               </a:rPr>
               <a:t>Before they did it, they expected the other person to feel awkward.</a:t>
             </a:r>
@@ -6019,7 +6019,7 @@
                 <a:solidFill>
                   <a:srgbClr val="3A3320"/>
                 </a:solidFill>
-                <a:latin typeface="Karla"/>
+                <a:latin typeface="Calibri"/>
               </a:rPr>
               <a:t>2</a:t>
             </a:r>
@@ -6057,11 +6057,11 @@
               </a:spcAft>
             </a:pPr>
             <a:r>
-              <a:rPr sz="1300" b="1" i="0">
+              <a:rPr sz="1300" b="0" i="0">
                 <a:solidFill>
                   <a:srgbClr val="3A3320"/>
                 </a:solidFill>
-                <a:latin typeface="Libre Caslon Display"/>
+                <a:latin typeface="Georgia"/>
               </a:rPr>
               <a:t>The other person felt much better than they predicted.</a:t>
             </a:r>
@@ -6103,7 +6103,7 @@
                 <a:solidFill>
                   <a:srgbClr val="5C6552"/>
                 </a:solidFill>
-                <a:latin typeface="Karla"/>
+                <a:latin typeface="Calibri"/>
               </a:rPr>
               <a:t>They were also far less bothered by it than the students had guessed.</a:t>
             </a:r>
@@ -6233,7 +6233,7 @@
                 <a:solidFill>
                   <a:srgbClr val="3A3320"/>
                 </a:solidFill>
-                <a:latin typeface="Karla"/>
+                <a:latin typeface="Calibri"/>
               </a:rPr>
               <a:t>3</a:t>
             </a:r>
@@ -6271,11 +6271,11 @@
               </a:spcAft>
             </a:pPr>
             <a:r>
-              <a:rPr sz="1300" b="1" i="0">
+              <a:rPr sz="1300" b="0" i="0">
                 <a:solidFill>
                   <a:srgbClr val="3A3320"/>
                 </a:solidFill>
-                <a:latin typeface="Libre Caslon Display"/>
+                <a:latin typeface="Georgia"/>
               </a:rPr>
               <a:t>The students giving the compliments felt better too.</a:t>
             </a:r>
@@ -6317,7 +6317,7 @@
                 <a:solidFill>
                   <a:srgbClr val="5C6552"/>
                 </a:solidFill>
-                <a:latin typeface="Karla"/>
+                <a:latin typeface="Calibri"/>
               </a:rPr>
               <a:t>Their nerves were what made them guess wrong.</a:t>
             </a:r>
@@ -6359,7 +6359,7 @@
                 <a:solidFill>
                   <a:srgbClr val="3A3320"/>
                 </a:solidFill>
-                <a:latin typeface="Karla"/>
+                <a:latin typeface="Calibri"/>
               </a:rPr>
               <a:t>Think about it: what stops you saying something nice you are already thinking?</a:t>
             </a:r>
@@ -6401,7 +6401,7 @@
                 <a:solidFill>
                   <a:srgbClr val="8B9179"/>
                 </a:solidFill>
-                <a:latin typeface="Karla"/>
+                <a:latin typeface="Calibri"/>
               </a:rPr>
               <a:t>Source: Boothby and Bohns, 2021</a:t>
             </a:r>
@@ -6467,7 +6467,7 @@
                 <a:solidFill>
                   <a:srgbClr val="8B9179"/>
                 </a:solidFill>
-                <a:latin typeface="Karla"/>
+                <a:latin typeface="Calibri"/>
               </a:rPr>
               <a:t>The Pastoral Guide</a:t>
             </a:r>
@@ -6509,7 +6509,7 @@
                 <a:solidFill>
                   <a:srgbClr val="8B9179"/>
                 </a:solidFill>
-                <a:latin typeface="Karla"/>
+                <a:latin typeface="Calibri"/>
               </a:rPr>
               <a:t>5 / 11</a:t>
             </a:r>
@@ -6613,7 +6613,7 @@
                 <a:solidFill>
                   <a:srgbClr val="3A3320"/>
                 </a:solidFill>
-                <a:latin typeface="Karla"/>
+                <a:latin typeface="Calibri"/>
               </a:rPr>
               <a:t>WHAT THE RESEARCH FOUND</a:t>
             </a:r>
@@ -6651,11 +6651,11 @@
               </a:spcAft>
             </a:pPr>
             <a:r>
-              <a:rPr sz="2600" b="1" i="0">
+              <a:rPr sz="2600" b="0" i="0">
                 <a:solidFill>
                   <a:srgbClr val="2E3436"/>
                 </a:solidFill>
-                <a:latin typeface="Libre Caslon Display"/>
+                <a:latin typeface="Georgia"/>
               </a:rPr>
               <a:t>A thank-you means more than we think</a:t>
             </a:r>
@@ -6785,7 +6785,7 @@
                 <a:solidFill>
                   <a:srgbClr val="3A3320"/>
                 </a:solidFill>
-                <a:latin typeface="Karla"/>
+                <a:latin typeface="Calibri"/>
               </a:rPr>
               <a:t>1</a:t>
             </a:r>
@@ -6823,11 +6823,11 @@
               </a:spcAft>
             </a:pPr>
             <a:r>
-              <a:rPr sz="1300" b="1" i="0">
+              <a:rPr sz="1300" b="0" i="0">
                 <a:solidFill>
                   <a:srgbClr val="3A3320"/>
                 </a:solidFill>
-                <a:latin typeface="Libre Caslon Display"/>
+                <a:latin typeface="Georgia"/>
               </a:rPr>
               <a:t>Adults wrote a short thank-you letter to someone who had helped them.</a:t>
             </a:r>
@@ -6869,7 +6869,7 @@
                 <a:solidFill>
                   <a:srgbClr val="5C6552"/>
                 </a:solidFill>
-                <a:latin typeface="Karla"/>
+                <a:latin typeface="Calibri"/>
               </a:rPr>
               <a:t>Then they guessed how the other person would react.</a:t>
             </a:r>
@@ -6999,7 +6999,7 @@
                 <a:solidFill>
                   <a:srgbClr val="3A3320"/>
                 </a:solidFill>
-                <a:latin typeface="Karla"/>
+                <a:latin typeface="Calibri"/>
               </a:rPr>
               <a:t>2</a:t>
             </a:r>
@@ -7037,11 +7037,11 @@
               </a:spcAft>
             </a:pPr>
             <a:r>
-              <a:rPr sz="1300" b="1" i="0">
+              <a:rPr sz="1300" b="0" i="0">
                 <a:solidFill>
                   <a:srgbClr val="3A3320"/>
                 </a:solidFill>
-                <a:latin typeface="Libre Caslon Display"/>
+                <a:latin typeface="Georgia"/>
               </a:rPr>
               <a:t>They underestimated how surprised and happy the person would be.</a:t>
             </a:r>
@@ -7083,7 +7083,7 @@
                 <a:solidFill>
                   <a:srgbClr val="5C6552"/>
                 </a:solidFill>
-                <a:latin typeface="Karla"/>
+                <a:latin typeface="Calibri"/>
               </a:rPr>
               <a:t>The letters mattered more than the writers expected.</a:t>
             </a:r>
@@ -7213,7 +7213,7 @@
                 <a:solidFill>
                   <a:srgbClr val="3A3320"/>
                 </a:solidFill>
-                <a:latin typeface="Karla"/>
+                <a:latin typeface="Calibri"/>
               </a:rPr>
               <a:t>3</a:t>
             </a:r>
@@ -7251,11 +7251,11 @@
               </a:spcAft>
             </a:pPr>
             <a:r>
-              <a:rPr sz="1300" b="1" i="0">
+              <a:rPr sz="1300" b="0" i="0">
                 <a:solidFill>
                   <a:srgbClr val="3A3320"/>
                 </a:solidFill>
-                <a:latin typeface="Libre Caslon Display"/>
+                <a:latin typeface="Georgia"/>
               </a:rPr>
               <a:t>They expected it to be awkward. It was less awkward than they thought.</a:t>
             </a:r>
@@ -7297,7 +7297,7 @@
                 <a:solidFill>
                   <a:srgbClr val="5C6552"/>
                 </a:solidFill>
-                <a:latin typeface="Karla"/>
+                <a:latin typeface="Calibri"/>
               </a:rPr>
               <a:t>Most of the worry was in their own heads.</a:t>
             </a:r>
@@ -7339,7 +7339,7 @@
                 <a:solidFill>
                   <a:srgbClr val="3A3320"/>
                 </a:solidFill>
-                <a:latin typeface="Karla"/>
+                <a:latin typeface="Calibri"/>
               </a:rPr>
               <a:t>Think about it: who have you never properly thanked?</a:t>
             </a:r>
@@ -7381,7 +7381,7 @@
                 <a:solidFill>
                   <a:srgbClr val="8B9179"/>
                 </a:solidFill>
-                <a:latin typeface="Karla"/>
+                <a:latin typeface="Calibri"/>
               </a:rPr>
               <a:t>Source: Kumar and Epley, 2018</a:t>
             </a:r>
@@ -7447,7 +7447,7 @@
                 <a:solidFill>
                   <a:srgbClr val="8B9179"/>
                 </a:solidFill>
-                <a:latin typeface="Karla"/>
+                <a:latin typeface="Calibri"/>
               </a:rPr>
               <a:t>The Pastoral Guide</a:t>
             </a:r>
@@ -7489,7 +7489,7 @@
                 <a:solidFill>
                   <a:srgbClr val="8B9179"/>
                 </a:solidFill>
-                <a:latin typeface="Karla"/>
+                <a:latin typeface="Calibri"/>
               </a:rPr>
               <a:t>6 / 11</a:t>
             </a:r>
@@ -7593,7 +7593,7 @@
                 <a:solidFill>
                   <a:srgbClr val="3A3320"/>
                 </a:solidFill>
-                <a:latin typeface="Karla"/>
+                <a:latin typeface="Calibri"/>
               </a:rPr>
               <a:t>WHAT THE RESEARCH FOUND</a:t>
             </a:r>
@@ -7631,11 +7631,11 @@
               </a:spcAft>
             </a:pPr>
             <a:r>
-              <a:rPr sz="3000" b="1" i="0">
+              <a:rPr sz="3000" b="0" i="0">
                 <a:solidFill>
                   <a:srgbClr val="2E3436"/>
                 </a:solidFill>
-                <a:latin typeface="Libre Caslon Display"/>
+                <a:latin typeface="Georgia"/>
               </a:rPr>
               <a:t>Kindness and friendships</a:t>
             </a:r>
@@ -7765,7 +7765,7 @@
                 <a:solidFill>
                   <a:srgbClr val="3A3320"/>
                 </a:solidFill>
-                <a:latin typeface="Karla"/>
+                <a:latin typeface="Calibri"/>
               </a:rPr>
               <a:t>1</a:t>
             </a:r>
@@ -7803,11 +7803,11 @@
               </a:spcAft>
             </a:pPr>
             <a:r>
-              <a:rPr sz="1300" b="1" i="0">
+              <a:rPr sz="1300" b="0" i="0">
                 <a:solidFill>
                   <a:srgbClr val="3A3320"/>
                 </a:solidFill>
-                <a:latin typeface="Libre Caslon Display"/>
+                <a:latin typeface="Georgia"/>
               </a:rPr>
               <a:t>In Canada, 9 to 11 year olds did three kind acts a week for four weeks.</a:t>
             </a:r>
@@ -7849,7 +7849,7 @@
                 <a:solidFill>
                   <a:srgbClr val="5C6552"/>
                 </a:solidFill>
-                <a:latin typeface="Karla"/>
+                <a:latin typeface="Calibri"/>
               </a:rPr>
               <a:t>Another group visited three places a week instead.</a:t>
             </a:r>
@@ -7979,7 +7979,7 @@
                 <a:solidFill>
                   <a:srgbClr val="3A3320"/>
                 </a:solidFill>
-                <a:latin typeface="Karla"/>
+                <a:latin typeface="Calibri"/>
               </a:rPr>
               <a:t>2</a:t>
             </a:r>
@@ -8017,11 +8017,11 @@
               </a:spcAft>
             </a:pPr>
             <a:r>
-              <a:rPr sz="1300" b="1" i="0">
+              <a:rPr sz="1300" b="0" i="0">
                 <a:solidFill>
                   <a:srgbClr val="3A3320"/>
                 </a:solidFill>
-                <a:latin typeface="Libre Caslon Display"/>
+                <a:latin typeface="Georgia"/>
               </a:rPr>
               <a:t>Afterwards, more classmates wanted to spend time with them.</a:t>
             </a:r>
@@ -8063,7 +8063,7 @@
                 <a:solidFill>
                   <a:srgbClr val="5C6552"/>
                 </a:solidFill>
-                <a:latin typeface="Karla"/>
+                <a:latin typeface="Calibri"/>
               </a:rPr>
               <a:t>Both groups gained some, but the kind group gained about twice as many.</a:t>
             </a:r>
@@ -8193,7 +8193,7 @@
                 <a:solidFill>
                   <a:srgbClr val="3A3320"/>
                 </a:solidFill>
-                <a:latin typeface="Karla"/>
+                <a:latin typeface="Calibri"/>
               </a:rPr>
               <a:t>3</a:t>
             </a:r>
@@ -8231,11 +8231,11 @@
               </a:spcAft>
             </a:pPr>
             <a:r>
-              <a:rPr sz="1300" b="1" i="0">
+              <a:rPr sz="1300" b="0" i="0">
                 <a:solidFill>
                   <a:srgbClr val="3A3320"/>
                 </a:solidFill>
-                <a:latin typeface="Libre Caslon Display"/>
+                <a:latin typeface="Georgia"/>
               </a:rPr>
               <a:t>They were younger than you, so the honest answer is: test it yourself.</a:t>
             </a:r>
@@ -8277,7 +8277,7 @@
                 <a:solidFill>
                   <a:srgbClr val="5C6552"/>
                 </a:solidFill>
-                <a:latin typeface="Karla"/>
+                <a:latin typeface="Calibri"/>
               </a:rPr>
               <a:t>That is what this week is for.</a:t>
             </a:r>
@@ -8319,7 +8319,7 @@
                 <a:solidFill>
                   <a:srgbClr val="3A3320"/>
                 </a:solidFill>
-                <a:latin typeface="Karla"/>
+                <a:latin typeface="Calibri"/>
               </a:rPr>
               <a:t>Think about it: who in this room would you like to know better?</a:t>
             </a:r>
@@ -8361,7 +8361,7 @@
                 <a:solidFill>
                   <a:srgbClr val="8B9179"/>
                 </a:solidFill>
-                <a:latin typeface="Karla"/>
+                <a:latin typeface="Calibri"/>
               </a:rPr>
               <a:t>Source: Layous et al., 2012</a:t>
             </a:r>
@@ -8427,7 +8427,7 @@
                 <a:solidFill>
                   <a:srgbClr val="8B9179"/>
                 </a:solidFill>
-                <a:latin typeface="Karla"/>
+                <a:latin typeface="Calibri"/>
               </a:rPr>
               <a:t>The Pastoral Guide</a:t>
             </a:r>
@@ -8469,7 +8469,7 @@
                 <a:solidFill>
                   <a:srgbClr val="8B9179"/>
                 </a:solidFill>
-                <a:latin typeface="Karla"/>
+                <a:latin typeface="Calibri"/>
               </a:rPr>
               <a:t>7 / 11</a:t>
             </a:r>
@@ -8573,7 +8573,7 @@
                 <a:solidFill>
                   <a:srgbClr val="3A3320"/>
                 </a:solidFill>
-                <a:latin typeface="Karla"/>
+                <a:latin typeface="Calibri"/>
               </a:rPr>
               <a:t>SO WHY DON’T WE</a:t>
             </a:r>
@@ -8611,11 +8611,11 @@
               </a:spcAft>
             </a:pPr>
             <a:r>
-              <a:rPr sz="3200" b="1" i="0">
+              <a:rPr sz="3200" b="0" i="0">
                 <a:solidFill>
                   <a:srgbClr val="2E3436"/>
                 </a:solidFill>
-                <a:latin typeface="Libre Caslon Display"/>
+                <a:latin typeface="Georgia"/>
               </a:rPr>
               <a:t>Why we hold back</a:t>
             </a:r>
@@ -8765,11 +8765,11 @@
               </a:spcAft>
             </a:pPr>
             <a:r>
-              <a:rPr sz="1350" b="1" i="0">
+              <a:rPr sz="1350" b="0" i="0">
                 <a:solidFill>
                   <a:srgbClr val="3A3320"/>
                 </a:solidFill>
-                <a:latin typeface="Libre Caslon Display"/>
+                <a:latin typeface="Georgia"/>
               </a:rPr>
               <a:t>It will be awkward</a:t>
             </a:r>
@@ -8811,7 +8811,7 @@
                 <a:solidFill>
                   <a:srgbClr val="5C6552"/>
                 </a:solidFill>
-                <a:latin typeface="Karla"/>
+                <a:latin typeface="Calibri"/>
               </a:rPr>
               <a:t>It is usually far less awkward than we expect.</a:t>
             </a:r>
@@ -8961,11 +8961,11 @@
               </a:spcAft>
             </a:pPr>
             <a:r>
-              <a:rPr sz="1350" b="1" i="0">
+              <a:rPr sz="1350" b="0" i="0">
                 <a:solidFill>
                   <a:srgbClr val="3A3320"/>
                 </a:solidFill>
-                <a:latin typeface="Libre Caslon Display"/>
+                <a:latin typeface="Georgia"/>
               </a:rPr>
               <a:t>I will say it wrong</a:t>
             </a:r>
@@ -9007,7 +9007,7 @@
                 <a:solidFill>
                   <a:srgbClr val="5C6552"/>
                 </a:solidFill>
-                <a:latin typeface="Karla"/>
+                <a:latin typeface="Calibri"/>
               </a:rPr>
               <a:t>People remember that you said it, not the exact words.</a:t>
             </a:r>
@@ -9157,11 +9157,11 @@
               </a:spcAft>
             </a:pPr>
             <a:r>
-              <a:rPr sz="1350" b="1" i="0">
+              <a:rPr sz="1350" b="0" i="0">
                 <a:solidFill>
                   <a:srgbClr val="3A3320"/>
                 </a:solidFill>
-                <a:latin typeface="Libre Caslon Display"/>
+                <a:latin typeface="Georgia"/>
               </a:rPr>
               <a:t>It is too small</a:t>
             </a:r>
@@ -9203,7 +9203,7 @@
                 <a:solidFill>
                   <a:srgbClr val="5C6552"/>
                 </a:solidFill>
-                <a:latin typeface="Karla"/>
+                <a:latin typeface="Calibri"/>
               </a:rPr>
               <a:t>The person getting it rates it bigger than you do.</a:t>
             </a:r>
@@ -9245,7 +9245,7 @@
                 <a:solidFill>
                   <a:srgbClr val="3A3320"/>
                 </a:solidFill>
-                <a:latin typeface="Karla"/>
+                <a:latin typeface="Calibri"/>
               </a:rPr>
               <a:t>And being kind gives the person doing it a small but real lift too.</a:t>
             </a:r>
@@ -9287,7 +9287,7 @@
                 <a:solidFill>
                   <a:srgbClr val="8B9179"/>
                 </a:solidFill>
-                <a:latin typeface="Karla"/>
+                <a:latin typeface="Calibri"/>
               </a:rPr>
               <a:t>Source: Curry et al., 2018</a:t>
             </a:r>
@@ -9353,7 +9353,7 @@
                 <a:solidFill>
                   <a:srgbClr val="8B9179"/>
                 </a:solidFill>
-                <a:latin typeface="Karla"/>
+                <a:latin typeface="Calibri"/>
               </a:rPr>
               <a:t>The Pastoral Guide</a:t>
             </a:r>
@@ -9395,7 +9395,7 @@
                 <a:solidFill>
                   <a:srgbClr val="8B9179"/>
                 </a:solidFill>
-                <a:latin typeface="Karla"/>
+                <a:latin typeface="Calibri"/>
               </a:rPr>
               <a:t>8 / 11</a:t>
             </a:r>
@@ -9499,7 +9499,7 @@
                 <a:solidFill>
                   <a:srgbClr val="3A3320"/>
                 </a:solidFill>
-                <a:latin typeface="Karla"/>
+                <a:latin typeface="Calibri"/>
               </a:rPr>
               <a:t>IN FORM TIME THIS WEEK</a:t>
             </a:r>
@@ -9537,11 +9537,11 @@
               </a:spcAft>
             </a:pPr>
             <a:r>
-              <a:rPr sz="3200" b="1" i="0">
+              <a:rPr sz="3200" b="0" i="0">
                 <a:solidFill>
                   <a:srgbClr val="2E3436"/>
                 </a:solidFill>
-                <a:latin typeface="Libre Caslon Display"/>
+                <a:latin typeface="Georgia"/>
               </a:rPr>
               <a:t>Five minutes a day</a:t>
             </a:r>
@@ -9627,7 +9627,7 @@
                 <a:solidFill>
                   <a:srgbClr val="3A3320"/>
                 </a:solidFill>
-                <a:latin typeface="Karla"/>
+                <a:latin typeface="Calibri"/>
               </a:rPr>
               <a:t>MONDAY</a:t>
             </a:r>
@@ -9733,11 +9733,11 @@
               </a:spcAft>
             </a:pPr>
             <a:r>
-              <a:rPr sz="1350" b="1" i="0">
+              <a:rPr sz="1350" b="0" i="0">
                 <a:solidFill>
                   <a:srgbClr val="3A3320"/>
                 </a:solidFill>
-                <a:latin typeface="Libre Caslon Display"/>
+                <a:latin typeface="Georgia"/>
               </a:rPr>
               <a:t>Write a compliment</a:t>
             </a:r>
@@ -9823,7 +9823,7 @@
                 <a:solidFill>
                   <a:srgbClr val="3A3320"/>
                 </a:solidFill>
-                <a:latin typeface="Karla"/>
+                <a:latin typeface="Calibri"/>
               </a:rPr>
               <a:t>TUESDAY</a:t>
             </a:r>
@@ -9929,11 +9929,11 @@
               </a:spcAft>
             </a:pPr>
             <a:r>
-              <a:rPr sz="1350" b="1" i="0">
+              <a:rPr sz="1350" b="0" i="0">
                 <a:solidFill>
                   <a:srgbClr val="3A3320"/>
                 </a:solidFill>
-                <a:latin typeface="Libre Caslon Display"/>
+                <a:latin typeface="Georgia"/>
               </a:rPr>
               <a:t>Read yours</a:t>
             </a:r>
@@ -10019,7 +10019,7 @@
                 <a:solidFill>
                   <a:srgbClr val="3A3320"/>
                 </a:solidFill>
-                <a:latin typeface="Karla"/>
+                <a:latin typeface="Calibri"/>
               </a:rPr>
               <a:t>WEDNESDAY</a:t>
             </a:r>
@@ -10125,11 +10125,11 @@
               </a:spcAft>
             </a:pPr>
             <a:r>
-              <a:rPr sz="1350" b="1" i="0">
+              <a:rPr sz="1350" b="0" i="0">
                 <a:solidFill>
                   <a:srgbClr val="3A3320"/>
                 </a:solidFill>
-                <a:latin typeface="Libre Caslon Display"/>
+                <a:latin typeface="Georgia"/>
               </a:rPr>
               <a:t>Send a postcard</a:t>
             </a:r>
@@ -10215,7 +10215,7 @@
                 <a:solidFill>
                   <a:srgbClr val="3A3320"/>
                 </a:solidFill>
-                <a:latin typeface="Karla"/>
+                <a:latin typeface="Calibri"/>
               </a:rPr>
               <a:t>THURSDAY</a:t>
             </a:r>
@@ -10321,11 +10321,11 @@
               </a:spcAft>
             </a:pPr>
             <a:r>
-              <a:rPr sz="1350" b="1" i="0">
+              <a:rPr sz="1350" b="0" i="0">
                 <a:solidFill>
                   <a:srgbClr val="3A3320"/>
                 </a:solidFill>
-                <a:latin typeface="Libre Caslon Display"/>
+                <a:latin typeface="Georgia"/>
               </a:rPr>
               <a:t>Write a shout-out</a:t>
             </a:r>
@@ -10411,7 +10411,7 @@
                 <a:solidFill>
                   <a:srgbClr val="3A3320"/>
                 </a:solidFill>
-                <a:latin typeface="Karla"/>
+                <a:latin typeface="Calibri"/>
               </a:rPr>
               <a:t>FRIDAY</a:t>
             </a:r>
@@ -10517,11 +10517,11 @@
               </a:spcAft>
             </a:pPr>
             <a:r>
-              <a:rPr sz="1350" b="1" i="0">
+              <a:rPr sz="1350" b="0" i="0">
                 <a:solidFill>
                   <a:srgbClr val="3A3320"/>
                 </a:solidFill>
-                <a:latin typeface="Libre Caslon Display"/>
+                <a:latin typeface="Georgia"/>
               </a:rPr>
               <a:t>Shout-outs read out</a:t>
             </a:r>
@@ -10563,7 +10563,7 @@
                 <a:solidFill>
                   <a:srgbClr val="3A3320"/>
                 </a:solidFill>
-                <a:latin typeface="Karla"/>
+                <a:latin typeface="Calibri"/>
               </a:rPr>
               <a:t>Friday is World Kindness Day.</a:t>
             </a:r>
@@ -10629,7 +10629,7 @@
                 <a:solidFill>
                   <a:srgbClr val="8B9179"/>
                 </a:solidFill>
-                <a:latin typeface="Karla"/>
+                <a:latin typeface="Calibri"/>
               </a:rPr>
               <a:t>The Pastoral Guide</a:t>
             </a:r>
@@ -10671,7 +10671,7 @@
                 <a:solidFill>
                   <a:srgbClr val="8B9179"/>
                 </a:solidFill>
-                <a:latin typeface="Karla"/>
+                <a:latin typeface="Calibri"/>
               </a:rPr>
               <a:t>9 / 11</a:t>
             </a:r>
